--- a/assets/pptx/catalog-609.pptx
+++ b/assets/pptx/catalog-609.pptx
@@ -3265,7 +3265,7 @@
                 <a:ea typeface="Ebrima"/>
                 <a:cs typeface="Ebrima"/>
               </a:rPr>
-              <a:t>እጄን ዘርግቼ አመልክሃለሁ (2x)</a:t>
+              <a:t>እጄን ዘርግቼ አመልክሃለሁ 2x</a:t>
             </a:r>
           </a:p>
         </p:txBody>
@@ -3471,7 +3471,7 @@
                 <a:ea typeface="Ebrima"/>
                 <a:cs typeface="Ebrima"/>
               </a:rPr>
-              <a:t>እጄን ዘርግቼ አመልክሃለሁ (2x)</a:t>
+              <a:t>እጄን ዘርግቼ አመልክሃለሁ 2x</a:t>
             </a:r>
           </a:p>
         </p:txBody>
@@ -3677,7 +3677,7 @@
                 <a:ea typeface="Ebrima"/>
                 <a:cs typeface="Ebrima"/>
               </a:rPr>
-              <a:t>እጄን ዘርግቼ አመልክሃለሁ (2x)</a:t>
+              <a:t>እጄን ዘርግቼ አመልክሃለሁ 2x</a:t>
             </a:r>
           </a:p>
         </p:txBody>
@@ -3883,7 +3883,7 @@
                 <a:ea typeface="Ebrima"/>
                 <a:cs typeface="Ebrima"/>
               </a:rPr>
-              <a:t>እጄን ዘርግቼ አመልክሃለሁ (2x)</a:t>
+              <a:t>እጄን ዘርግቼ አመልክሃለሁ 2x</a:t>
             </a:r>
           </a:p>
         </p:txBody>
